--- a/chapter_04/tables/sed_params.pptx
+++ b/chapter_04/tables/sed_params.pptx
@@ -112,14 +112,33 @@
 </p:presentation>
 </file>
 
-<file path=ppt/revisionInfo.xml><?xml version="1.0" encoding="utf-8"?>
-<p1510:revInfo xmlns:a="http://schemas.openxmlformats.org/drawingml/2006/main" xmlns:r="http://schemas.openxmlformats.org/officeDocument/2006/relationships" xmlns:p1510="http://schemas.microsoft.com/office/powerpoint/2015/10/main">
-  <p1510:revLst>
-    <p1510:client id="{4FE2BEEA-55F3-417A-8FD5-E04C968B28F1}" v="53" dt="2025-05-14T08:11:36.154"/>
-    <p1510:client id="{689AFCE9-4A58-41FA-988E-E597B273A83F}" v="15" dt="2025-05-13T10:48:08.519"/>
-    <p1510:client id="{D58F1A07-BA8B-4797-B15A-A7F4D081AF03}" v="20" dt="2025-05-13T11:03:18.245"/>
-  </p1510:revLst>
-</p1510:revInfo>
+<file path=ppt/changesInfos/changesInfo1.xml><?xml version="1.0" encoding="utf-8"?>
+<pc:chgInfo xmlns:a="http://schemas.openxmlformats.org/drawingml/2006/main" xmlns:r="http://schemas.openxmlformats.org/officeDocument/2006/relationships" xmlns:ac="http://schemas.microsoft.com/office/drawing/2013/main/command" xmlns:pc="http://schemas.microsoft.com/office/powerpoint/2013/main/command">
+  <pc:docChgLst>
+    <pc:chgData name="Fatima Pillosu" userId="a6295d4dc9e22643" providerId="LiveId" clId="{87453732-75AC-4426-B5D3-B7C69C2D4F54}"/>
+    <pc:docChg chg="undo custSel modSld">
+      <pc:chgData name="Fatima Pillosu" userId="a6295d4dc9e22643" providerId="LiveId" clId="{87453732-75AC-4426-B5D3-B7C69C2D4F54}" dt="2026-01-19T13:46:22.391" v="85" actId="20577"/>
+      <pc:docMkLst>
+        <pc:docMk/>
+      </pc:docMkLst>
+      <pc:sldChg chg="modSp mod">
+        <pc:chgData name="Fatima Pillosu" userId="a6295d4dc9e22643" providerId="LiveId" clId="{87453732-75AC-4426-B5D3-B7C69C2D4F54}" dt="2026-01-19T13:46:22.391" v="85" actId="20577"/>
+        <pc:sldMkLst>
+          <pc:docMk/>
+          <pc:sldMk cId="3020345181" sldId="257"/>
+        </pc:sldMkLst>
+        <pc:graphicFrameChg chg="modGraphic">
+          <ac:chgData name="Fatima Pillosu" userId="a6295d4dc9e22643" providerId="LiveId" clId="{87453732-75AC-4426-B5D3-B7C69C2D4F54}" dt="2026-01-19T13:46:22.391" v="85" actId="20577"/>
+          <ac:graphicFrameMkLst>
+            <pc:docMk/>
+            <pc:sldMk cId="3020345181" sldId="257"/>
+            <ac:graphicFrameMk id="3" creationId="{15623DAB-A4E1-DF1C-9B96-E2C1CE9DE49A}"/>
+          </ac:graphicFrameMkLst>
+        </pc:graphicFrameChg>
+      </pc:sldChg>
+    </pc:docChg>
+  </pc:docChgLst>
+</pc:chgInfo>
 </file>
 
 <file path=ppt/slideLayouts/slideLayout1.xml><?xml version="1.0" encoding="utf-8"?>
@@ -253,7 +272,7 @@
           <a:p>
             <a:fld id="{1FB3EBC5-2BAE-4ECB-A995-B52653FE7498}" type="datetimeFigureOut">
               <a:rPr lang="en-GB" smtClean="0"/>
-              <a:t>13/05/2025</a:t>
+              <a:t>19/01/2026</a:t>
             </a:fld>
             <a:endParaRPr lang="en-GB"/>
           </a:p>
@@ -423,7 +442,7 @@
           <a:p>
             <a:fld id="{1FB3EBC5-2BAE-4ECB-A995-B52653FE7498}" type="datetimeFigureOut">
               <a:rPr lang="en-GB" smtClean="0"/>
-              <a:t>13/05/2025</a:t>
+              <a:t>19/01/2026</a:t>
             </a:fld>
             <a:endParaRPr lang="en-GB"/>
           </a:p>
@@ -603,7 +622,7 @@
           <a:p>
             <a:fld id="{1FB3EBC5-2BAE-4ECB-A995-B52653FE7498}" type="datetimeFigureOut">
               <a:rPr lang="en-GB" smtClean="0"/>
-              <a:t>13/05/2025</a:t>
+              <a:t>19/01/2026</a:t>
             </a:fld>
             <a:endParaRPr lang="en-GB"/>
           </a:p>
@@ -773,7 +792,7 @@
           <a:p>
             <a:fld id="{1FB3EBC5-2BAE-4ECB-A995-B52653FE7498}" type="datetimeFigureOut">
               <a:rPr lang="en-GB" smtClean="0"/>
-              <a:t>13/05/2025</a:t>
+              <a:t>19/01/2026</a:t>
             </a:fld>
             <a:endParaRPr lang="en-GB"/>
           </a:p>
@@ -1019,7 +1038,7 @@
           <a:p>
             <a:fld id="{1FB3EBC5-2BAE-4ECB-A995-B52653FE7498}" type="datetimeFigureOut">
               <a:rPr lang="en-GB" smtClean="0"/>
-              <a:t>13/05/2025</a:t>
+              <a:t>19/01/2026</a:t>
             </a:fld>
             <a:endParaRPr lang="en-GB"/>
           </a:p>
@@ -1251,7 +1270,7 @@
           <a:p>
             <a:fld id="{1FB3EBC5-2BAE-4ECB-A995-B52653FE7498}" type="datetimeFigureOut">
               <a:rPr lang="en-GB" smtClean="0"/>
-              <a:t>13/05/2025</a:t>
+              <a:t>19/01/2026</a:t>
             </a:fld>
             <a:endParaRPr lang="en-GB"/>
           </a:p>
@@ -1618,7 +1637,7 @@
           <a:p>
             <a:fld id="{1FB3EBC5-2BAE-4ECB-A995-B52653FE7498}" type="datetimeFigureOut">
               <a:rPr lang="en-GB" smtClean="0"/>
-              <a:t>13/05/2025</a:t>
+              <a:t>19/01/2026</a:t>
             </a:fld>
             <a:endParaRPr lang="en-GB"/>
           </a:p>
@@ -1736,7 +1755,7 @@
           <a:p>
             <a:fld id="{1FB3EBC5-2BAE-4ECB-A995-B52653FE7498}" type="datetimeFigureOut">
               <a:rPr lang="en-GB" smtClean="0"/>
-              <a:t>13/05/2025</a:t>
+              <a:t>19/01/2026</a:t>
             </a:fld>
             <a:endParaRPr lang="en-GB"/>
           </a:p>
@@ -1831,7 +1850,7 @@
           <a:p>
             <a:fld id="{1FB3EBC5-2BAE-4ECB-A995-B52653FE7498}" type="datetimeFigureOut">
               <a:rPr lang="en-GB" smtClean="0"/>
-              <a:t>13/05/2025</a:t>
+              <a:t>19/01/2026</a:t>
             </a:fld>
             <a:endParaRPr lang="en-GB"/>
           </a:p>
@@ -2108,7 +2127,7 @@
           <a:p>
             <a:fld id="{1FB3EBC5-2BAE-4ECB-A995-B52653FE7498}" type="datetimeFigureOut">
               <a:rPr lang="en-GB" smtClean="0"/>
-              <a:t>13/05/2025</a:t>
+              <a:t>19/01/2026</a:t>
             </a:fld>
             <a:endParaRPr lang="en-GB"/>
           </a:p>
@@ -2365,7 +2384,7 @@
           <a:p>
             <a:fld id="{1FB3EBC5-2BAE-4ECB-A995-B52653FE7498}" type="datetimeFigureOut">
               <a:rPr lang="en-GB" smtClean="0"/>
-              <a:t>13/05/2025</a:t>
+              <a:t>19/01/2026</a:t>
             </a:fld>
             <a:endParaRPr lang="en-GB"/>
           </a:p>
@@ -2578,7 +2597,7 @@
           <a:p>
             <a:fld id="{1FB3EBC5-2BAE-4ECB-A995-B52653FE7498}" type="datetimeFigureOut">
               <a:rPr lang="en-GB" smtClean="0"/>
-              <a:t>13/05/2025</a:t>
+              <a:t>19/01/2026</a:t>
             </a:fld>
             <a:endParaRPr lang="en-GB"/>
           </a:p>
@@ -2998,14 +3017,14 @@
           <p:nvPr>
             <p:extLst>
               <p:ext uri="{D42A27DB-BD31-4B8C-83A1-F6EECF244321}">
-                <p14:modId xmlns:p14="http://schemas.microsoft.com/office/powerpoint/2010/main" val="2680477406"/>
+                <p14:modId xmlns:p14="http://schemas.microsoft.com/office/powerpoint/2010/main" val="4108717537"/>
               </p:ext>
             </p:extLst>
           </p:nvPr>
         </p:nvGraphicFramePr>
         <p:xfrm>
           <a:off x="1" y="0"/>
-          <a:ext cx="4140000" cy="5949000"/>
+          <a:ext cx="4140000" cy="6055680"/>
         </p:xfrm>
         <a:graphic>
           <a:graphicData uri="http://schemas.openxmlformats.org/drawingml/2006/table">
@@ -3790,7 +3809,19 @@
                         <a:rPr lang="en-US" sz="700" dirty="0">
                           <a:latin typeface="Avenir Next LT Pro" panose="020B0504020202020204" pitchFamily="34" charset="0"/>
                         </a:rPr>
-                        <a:t>Type of events. The only event types permitted in SED are listed in Table 1 of Section 2.1.1 of the NWS Directive 10-1605.</a:t>
+                        <a:t>Type of events (e.g., riverine or </a:t>
+                      </a:r>
+                      <a:r>
+                        <a:rPr lang="en-US" sz="700">
+                          <a:latin typeface="Avenir Next LT Pro" panose="020B0504020202020204" pitchFamily="34" charset="0"/>
+                        </a:rPr>
+                        <a:t>flash floods). </a:t>
+                      </a:r>
+                      <a:r>
+                        <a:rPr lang="en-US" sz="700" dirty="0">
+                          <a:latin typeface="Avenir Next LT Pro" panose="020B0504020202020204" pitchFamily="34" charset="0"/>
+                        </a:rPr>
+                        <a:t>The only event types permitted in SED are listed in Table 1 of Section 2.1.1 of the NWS Directive 10-1605.</a:t>
                       </a:r>
                       <a:endParaRPr lang="en-GB" sz="700" dirty="0">
                         <a:latin typeface="Avenir Next LT Pro" panose="020B0504020202020204" pitchFamily="34" charset="0"/>

--- a/chapter_04/tables/sed_params.pptx
+++ b/chapter_04/tables/sed_params.pptx
@@ -2,12 +2,12 @@
 <file path=ppt/presentation.xml><?xml version="1.0" encoding="utf-8"?>
 <p:presentation xmlns:a="http://schemas.openxmlformats.org/drawingml/2006/main" xmlns:r="http://schemas.openxmlformats.org/officeDocument/2006/relationships" xmlns:p="http://schemas.openxmlformats.org/presentationml/2006/main" saveSubsetFonts="1">
   <p:sldMasterIdLst>
-    <p:sldMasterId id="2147483672" r:id="rId1"/>
+    <p:sldMasterId id="2147483684" r:id="rId1"/>
   </p:sldMasterIdLst>
   <p:sldIdLst>
     <p:sldId id="257" r:id="rId2"/>
   </p:sldIdLst>
-  <p:sldSz cx="4140200" cy="5951538"/>
+  <p:sldSz cx="4140200" cy="6054725"/>
   <p:notesSz cx="6858000" cy="9144000"/>
   <p:defaultTextStyle>
     <a:defPPr>
@@ -112,27 +112,51 @@
 </p:presentation>
 </file>
 
+<file path=ppt/revisionInfo.xml><?xml version="1.0" encoding="utf-8"?>
+<p1510:revInfo xmlns:a="http://schemas.openxmlformats.org/drawingml/2006/main" xmlns:r="http://schemas.openxmlformats.org/officeDocument/2006/relationships" xmlns:p1510="http://schemas.microsoft.com/office/powerpoint/2015/10/main">
+  <p1510:revLst>
+    <p1510:client id="{A8FB9957-027C-411D-A422-99249677AC41}" v="2" dt="2026-01-19T16:25:49.112"/>
+  </p1510:revLst>
+</p1510:revInfo>
+</file>
+
 <file path=ppt/changesInfos/changesInfo1.xml><?xml version="1.0" encoding="utf-8"?>
 <pc:chgInfo xmlns:a="http://schemas.openxmlformats.org/drawingml/2006/main" xmlns:r="http://schemas.openxmlformats.org/officeDocument/2006/relationships" xmlns:ac="http://schemas.microsoft.com/office/drawing/2013/main/command" xmlns:pc="http://schemas.microsoft.com/office/powerpoint/2013/main/command">
   <pc:docChgLst>
     <pc:chgData name="Fatima Pillosu" userId="a6295d4dc9e22643" providerId="LiveId" clId="{87453732-75AC-4426-B5D3-B7C69C2D4F54}"/>
     <pc:docChg chg="undo custSel modSld">
-      <pc:chgData name="Fatima Pillosu" userId="a6295d4dc9e22643" providerId="LiveId" clId="{87453732-75AC-4426-B5D3-B7C69C2D4F54}" dt="2026-01-19T13:46:22.391" v="85" actId="20577"/>
+      <pc:chgData name="Fatima Pillosu" userId="a6295d4dc9e22643" providerId="LiveId" clId="{87453732-75AC-4426-B5D3-B7C69C2D4F54}" dt="2026-01-19T16:25:49.112" v="89"/>
       <pc:docMkLst>
         <pc:docMk/>
       </pc:docMkLst>
-      <pc:sldChg chg="modSp mod">
-        <pc:chgData name="Fatima Pillosu" userId="a6295d4dc9e22643" providerId="LiveId" clId="{87453732-75AC-4426-B5D3-B7C69C2D4F54}" dt="2026-01-19T13:46:22.391" v="85" actId="20577"/>
+      <pc:sldChg chg="addSp delSp modSp mod">
+        <pc:chgData name="Fatima Pillosu" userId="a6295d4dc9e22643" providerId="LiveId" clId="{87453732-75AC-4426-B5D3-B7C69C2D4F54}" dt="2026-01-19T16:25:49.112" v="89"/>
         <pc:sldMkLst>
           <pc:docMk/>
           <pc:sldMk cId="3020345181" sldId="257"/>
         </pc:sldMkLst>
-        <pc:graphicFrameChg chg="modGraphic">
-          <ac:chgData name="Fatima Pillosu" userId="a6295d4dc9e22643" providerId="LiveId" clId="{87453732-75AC-4426-B5D3-B7C69C2D4F54}" dt="2026-01-19T13:46:22.391" v="85" actId="20577"/>
+        <pc:spChg chg="add del">
+          <ac:chgData name="Fatima Pillosu" userId="a6295d4dc9e22643" providerId="LiveId" clId="{87453732-75AC-4426-B5D3-B7C69C2D4F54}" dt="2026-01-19T16:25:34.688" v="87" actId="478"/>
+          <ac:spMkLst>
+            <pc:docMk/>
+            <pc:sldMk cId="3020345181" sldId="257"/>
+            <ac:spMk id="2" creationId="{FB07BD71-DFD2-5C9A-1F5E-068CC8099799}"/>
+          </ac:spMkLst>
+        </pc:spChg>
+        <pc:graphicFrameChg chg="del modGraphic">
+          <ac:chgData name="Fatima Pillosu" userId="a6295d4dc9e22643" providerId="LiveId" clId="{87453732-75AC-4426-B5D3-B7C69C2D4F54}" dt="2026-01-19T16:25:35.945" v="88" actId="21"/>
           <ac:graphicFrameMkLst>
             <pc:docMk/>
             <pc:sldMk cId="3020345181" sldId="257"/>
             <ac:graphicFrameMk id="3" creationId="{15623DAB-A4E1-DF1C-9B96-E2C1CE9DE49A}"/>
+          </ac:graphicFrameMkLst>
+        </pc:graphicFrameChg>
+        <pc:graphicFrameChg chg="add mod">
+          <ac:chgData name="Fatima Pillosu" userId="a6295d4dc9e22643" providerId="LiveId" clId="{87453732-75AC-4426-B5D3-B7C69C2D4F54}" dt="2026-01-19T16:25:49.112" v="89"/>
+          <ac:graphicFrameMkLst>
+            <pc:docMk/>
+            <pc:sldMk cId="3020345181" sldId="257"/>
+            <ac:graphicFrameMk id="4" creationId="{15623DAB-A4E1-DF1C-9B96-E2C1CE9DE49A}"/>
           </ac:graphicFrameMkLst>
         </pc:graphicFrameChg>
       </pc:sldChg>
@@ -170,8 +194,8 @@
         </p:nvSpPr>
         <p:spPr>
           <a:xfrm>
-            <a:off x="310515" y="974014"/>
-            <a:ext cx="3519170" cy="2072017"/>
+            <a:off x="310515" y="990901"/>
+            <a:ext cx="3519170" cy="2107941"/>
           </a:xfrm>
         </p:spPr>
         <p:txBody>
@@ -202,8 +226,8 @@
         </p:nvSpPr>
         <p:spPr>
           <a:xfrm>
-            <a:off x="517525" y="3125936"/>
-            <a:ext cx="3105150" cy="1436910"/>
+            <a:off x="517525" y="3180133"/>
+            <a:ext cx="3105150" cy="1461823"/>
           </a:xfrm>
         </p:spPr>
         <p:txBody>
@@ -323,7 +347,7 @@
     </p:spTree>
     <p:extLst>
       <p:ext uri="{BB962C8B-B14F-4D97-AF65-F5344CB8AC3E}">
-        <p14:creationId xmlns:p14="http://schemas.microsoft.com/office/powerpoint/2010/main" val="2825135257"/>
+        <p14:creationId xmlns:p14="http://schemas.microsoft.com/office/powerpoint/2010/main" val="3056365099"/>
       </p:ext>
     </p:extLst>
   </p:cSld>
@@ -493,7 +517,7 @@
     </p:spTree>
     <p:extLst>
       <p:ext uri="{BB962C8B-B14F-4D97-AF65-F5344CB8AC3E}">
-        <p14:creationId xmlns:p14="http://schemas.microsoft.com/office/powerpoint/2010/main" val="3387921690"/>
+        <p14:creationId xmlns:p14="http://schemas.microsoft.com/office/powerpoint/2010/main" val="1074322896"/>
       </p:ext>
     </p:extLst>
   </p:cSld>
@@ -532,8 +556,8 @@
         </p:nvSpPr>
         <p:spPr>
           <a:xfrm>
-            <a:off x="2962831" y="316864"/>
-            <a:ext cx="892731" cy="5043653"/>
+            <a:off x="2962831" y="322358"/>
+            <a:ext cx="892731" cy="5131100"/>
           </a:xfrm>
         </p:spPr>
         <p:txBody>
@@ -560,8 +584,8 @@
         </p:nvSpPr>
         <p:spPr>
           <a:xfrm>
-            <a:off x="284639" y="316864"/>
-            <a:ext cx="2626439" cy="5043653"/>
+            <a:off x="284639" y="322358"/>
+            <a:ext cx="2626439" cy="5131100"/>
           </a:xfrm>
         </p:spPr>
         <p:txBody>
@@ -673,7 +697,7 @@
     </p:spTree>
     <p:extLst>
       <p:ext uri="{BB962C8B-B14F-4D97-AF65-F5344CB8AC3E}">
-        <p14:creationId xmlns:p14="http://schemas.microsoft.com/office/powerpoint/2010/main" val="1033206106"/>
+        <p14:creationId xmlns:p14="http://schemas.microsoft.com/office/powerpoint/2010/main" val="1030295927"/>
       </p:ext>
     </p:extLst>
   </p:cSld>
@@ -843,7 +867,7 @@
     </p:spTree>
     <p:extLst>
       <p:ext uri="{BB962C8B-B14F-4D97-AF65-F5344CB8AC3E}">
-        <p14:creationId xmlns:p14="http://schemas.microsoft.com/office/powerpoint/2010/main" val="1529542918"/>
+        <p14:creationId xmlns:p14="http://schemas.microsoft.com/office/powerpoint/2010/main" val="4005030360"/>
       </p:ext>
     </p:extLst>
   </p:cSld>
@@ -882,8 +906,8 @@
         </p:nvSpPr>
         <p:spPr>
           <a:xfrm>
-            <a:off x="282482" y="1483753"/>
-            <a:ext cx="3570923" cy="2475674"/>
+            <a:off x="282482" y="1509478"/>
+            <a:ext cx="3570923" cy="2518597"/>
           </a:xfrm>
         </p:spPr>
         <p:txBody>
@@ -914,8 +938,8 @@
         </p:nvSpPr>
         <p:spPr>
           <a:xfrm>
-            <a:off x="282482" y="3982848"/>
-            <a:ext cx="3570923" cy="1301899"/>
+            <a:off x="282482" y="4051902"/>
+            <a:ext cx="3570923" cy="1324471"/>
           </a:xfrm>
         </p:spPr>
         <p:txBody>
@@ -1089,7 +1113,7 @@
     </p:spTree>
     <p:extLst>
       <p:ext uri="{BB962C8B-B14F-4D97-AF65-F5344CB8AC3E}">
-        <p14:creationId xmlns:p14="http://schemas.microsoft.com/office/powerpoint/2010/main" val="1823637527"/>
+        <p14:creationId xmlns:p14="http://schemas.microsoft.com/office/powerpoint/2010/main" val="3356060354"/>
       </p:ext>
     </p:extLst>
   </p:cSld>
@@ -1151,8 +1175,8 @@
         </p:nvSpPr>
         <p:spPr>
           <a:xfrm>
-            <a:off x="284639" y="1584322"/>
-            <a:ext cx="1759585" cy="3776196"/>
+            <a:off x="284639" y="1611790"/>
+            <a:ext cx="1759585" cy="3841667"/>
           </a:xfrm>
         </p:spPr>
         <p:txBody>
@@ -1208,8 +1232,8 @@
         </p:nvSpPr>
         <p:spPr>
           <a:xfrm>
-            <a:off x="2095976" y="1584322"/>
-            <a:ext cx="1759585" cy="3776196"/>
+            <a:off x="2095976" y="1611790"/>
+            <a:ext cx="1759585" cy="3841667"/>
           </a:xfrm>
         </p:spPr>
         <p:txBody>
@@ -1321,7 +1345,7 @@
     </p:spTree>
     <p:extLst>
       <p:ext uri="{BB962C8B-B14F-4D97-AF65-F5344CB8AC3E}">
-        <p14:creationId xmlns:p14="http://schemas.microsoft.com/office/powerpoint/2010/main" val="372301843"/>
+        <p14:creationId xmlns:p14="http://schemas.microsoft.com/office/powerpoint/2010/main" val="3162700727"/>
       </p:ext>
     </p:extLst>
   </p:cSld>
@@ -1360,8 +1384,8 @@
         </p:nvSpPr>
         <p:spPr>
           <a:xfrm>
-            <a:off x="285178" y="316865"/>
-            <a:ext cx="3570923" cy="1150356"/>
+            <a:off x="285178" y="322360"/>
+            <a:ext cx="3570923" cy="1170300"/>
           </a:xfrm>
         </p:spPr>
         <p:txBody>
@@ -1388,8 +1412,8 @@
         </p:nvSpPr>
         <p:spPr>
           <a:xfrm>
-            <a:off x="285179" y="1458954"/>
-            <a:ext cx="1751498" cy="715011"/>
+            <a:off x="285179" y="1484249"/>
+            <a:ext cx="1751498" cy="727407"/>
           </a:xfrm>
         </p:spPr>
         <p:txBody>
@@ -1453,8 +1477,8 @@
         </p:nvSpPr>
         <p:spPr>
           <a:xfrm>
-            <a:off x="285179" y="2173965"/>
-            <a:ext cx="1751498" cy="3197574"/>
+            <a:off x="285179" y="2211656"/>
+            <a:ext cx="1751498" cy="3253014"/>
           </a:xfrm>
         </p:spPr>
         <p:txBody>
@@ -1510,8 +1534,8 @@
         </p:nvSpPr>
         <p:spPr>
           <a:xfrm>
-            <a:off x="2095977" y="1458954"/>
-            <a:ext cx="1760124" cy="715011"/>
+            <a:off x="2095977" y="1484249"/>
+            <a:ext cx="1760124" cy="727407"/>
           </a:xfrm>
         </p:spPr>
         <p:txBody>
@@ -1575,8 +1599,8 @@
         </p:nvSpPr>
         <p:spPr>
           <a:xfrm>
-            <a:off x="2095977" y="2173965"/>
-            <a:ext cx="1760124" cy="3197574"/>
+            <a:off x="2095977" y="2211656"/>
+            <a:ext cx="1760124" cy="3253014"/>
           </a:xfrm>
         </p:spPr>
         <p:txBody>
@@ -1688,7 +1712,7 @@
     </p:spTree>
     <p:extLst>
       <p:ext uri="{BB962C8B-B14F-4D97-AF65-F5344CB8AC3E}">
-        <p14:creationId xmlns:p14="http://schemas.microsoft.com/office/powerpoint/2010/main" val="2861857229"/>
+        <p14:creationId xmlns:p14="http://schemas.microsoft.com/office/powerpoint/2010/main" val="765091922"/>
       </p:ext>
     </p:extLst>
   </p:cSld>
@@ -1806,7 +1830,7 @@
     </p:spTree>
     <p:extLst>
       <p:ext uri="{BB962C8B-B14F-4D97-AF65-F5344CB8AC3E}">
-        <p14:creationId xmlns:p14="http://schemas.microsoft.com/office/powerpoint/2010/main" val="2977257188"/>
+        <p14:creationId xmlns:p14="http://schemas.microsoft.com/office/powerpoint/2010/main" val="4076161740"/>
       </p:ext>
     </p:extLst>
   </p:cSld>
@@ -1901,7 +1925,7 @@
     </p:spTree>
     <p:extLst>
       <p:ext uri="{BB962C8B-B14F-4D97-AF65-F5344CB8AC3E}">
-        <p14:creationId xmlns:p14="http://schemas.microsoft.com/office/powerpoint/2010/main" val="3337482364"/>
+        <p14:creationId xmlns:p14="http://schemas.microsoft.com/office/powerpoint/2010/main" val="3526619518"/>
       </p:ext>
     </p:extLst>
   </p:cSld>
@@ -1940,8 +1964,8 @@
         </p:nvSpPr>
         <p:spPr>
           <a:xfrm>
-            <a:off x="285178" y="396769"/>
-            <a:ext cx="1335322" cy="1388692"/>
+            <a:off x="285178" y="403648"/>
+            <a:ext cx="1335322" cy="1412769"/>
           </a:xfrm>
         </p:spPr>
         <p:txBody>
@@ -1972,8 +1996,8 @@
         </p:nvSpPr>
         <p:spPr>
           <a:xfrm>
-            <a:off x="1760124" y="856913"/>
-            <a:ext cx="2095976" cy="4229449"/>
+            <a:off x="1760124" y="871770"/>
+            <a:ext cx="2095976" cy="4302779"/>
           </a:xfrm>
         </p:spPr>
         <p:txBody>
@@ -2057,8 +2081,8 @@
         </p:nvSpPr>
         <p:spPr>
           <a:xfrm>
-            <a:off x="285178" y="1785461"/>
-            <a:ext cx="1335322" cy="3307788"/>
+            <a:off x="285178" y="1816418"/>
+            <a:ext cx="1335322" cy="3365138"/>
           </a:xfrm>
         </p:spPr>
         <p:txBody>
@@ -2178,7 +2202,7 @@
     </p:spTree>
     <p:extLst>
       <p:ext uri="{BB962C8B-B14F-4D97-AF65-F5344CB8AC3E}">
-        <p14:creationId xmlns:p14="http://schemas.microsoft.com/office/powerpoint/2010/main" val="1556387825"/>
+        <p14:creationId xmlns:p14="http://schemas.microsoft.com/office/powerpoint/2010/main" val="2362837110"/>
       </p:ext>
     </p:extLst>
   </p:cSld>
@@ -2217,8 +2241,8 @@
         </p:nvSpPr>
         <p:spPr>
           <a:xfrm>
-            <a:off x="285178" y="396769"/>
-            <a:ext cx="1335322" cy="1388692"/>
+            <a:off x="285178" y="403648"/>
+            <a:ext cx="1335322" cy="1412769"/>
           </a:xfrm>
         </p:spPr>
         <p:txBody>
@@ -2249,8 +2273,8 @@
         </p:nvSpPr>
         <p:spPr>
           <a:xfrm>
-            <a:off x="1760124" y="856913"/>
-            <a:ext cx="2095976" cy="4229449"/>
+            <a:off x="1760124" y="871770"/>
+            <a:ext cx="2095976" cy="4302779"/>
           </a:xfrm>
         </p:spPr>
         <p:txBody>
@@ -2314,8 +2338,8 @@
         </p:nvSpPr>
         <p:spPr>
           <a:xfrm>
-            <a:off x="285178" y="1785461"/>
-            <a:ext cx="1335322" cy="3307788"/>
+            <a:off x="285178" y="1816418"/>
+            <a:ext cx="1335322" cy="3365138"/>
           </a:xfrm>
         </p:spPr>
         <p:txBody>
@@ -2435,7 +2459,7 @@
     </p:spTree>
     <p:extLst>
       <p:ext uri="{BB962C8B-B14F-4D97-AF65-F5344CB8AC3E}">
-        <p14:creationId xmlns:p14="http://schemas.microsoft.com/office/powerpoint/2010/main" val="2203863114"/>
+        <p14:creationId xmlns:p14="http://schemas.microsoft.com/office/powerpoint/2010/main" val="77372892"/>
       </p:ext>
     </p:extLst>
   </p:cSld>
@@ -2479,8 +2503,8 @@
         </p:nvSpPr>
         <p:spPr>
           <a:xfrm>
-            <a:off x="284639" y="316865"/>
-            <a:ext cx="3570923" cy="1150356"/>
+            <a:off x="284639" y="322360"/>
+            <a:ext cx="3570923" cy="1170300"/>
           </a:xfrm>
           <a:prstGeom prst="rect">
             <a:avLst/>
@@ -2512,8 +2536,8 @@
         </p:nvSpPr>
         <p:spPr>
           <a:xfrm>
-            <a:off x="284639" y="1584322"/>
-            <a:ext cx="3570923" cy="3776196"/>
+            <a:off x="284639" y="1611790"/>
+            <a:ext cx="3570923" cy="3841667"/>
           </a:xfrm>
           <a:prstGeom prst="rect">
             <a:avLst/>
@@ -2574,8 +2598,8 @@
         </p:nvSpPr>
         <p:spPr>
           <a:xfrm>
-            <a:off x="284639" y="5516195"/>
-            <a:ext cx="931545" cy="316864"/>
+            <a:off x="284639" y="5611834"/>
+            <a:ext cx="931545" cy="322358"/>
           </a:xfrm>
           <a:prstGeom prst="rect">
             <a:avLst/>
@@ -2615,8 +2639,8 @@
         </p:nvSpPr>
         <p:spPr>
           <a:xfrm>
-            <a:off x="1371441" y="5516195"/>
-            <a:ext cx="1397318" cy="316864"/>
+            <a:off x="1371441" y="5611834"/>
+            <a:ext cx="1397318" cy="322358"/>
           </a:xfrm>
           <a:prstGeom prst="rect">
             <a:avLst/>
@@ -2652,8 +2676,8 @@
         </p:nvSpPr>
         <p:spPr>
           <a:xfrm>
-            <a:off x="2924016" y="5516195"/>
-            <a:ext cx="931545" cy="316864"/>
+            <a:off x="2924016" y="5611834"/>
+            <a:ext cx="931545" cy="322358"/>
           </a:xfrm>
           <a:prstGeom prst="rect">
             <a:avLst/>
@@ -2684,23 +2708,23 @@
     </p:spTree>
     <p:extLst>
       <p:ext uri="{BB962C8B-B14F-4D97-AF65-F5344CB8AC3E}">
-        <p14:creationId xmlns:p14="http://schemas.microsoft.com/office/powerpoint/2010/main" val="1118199489"/>
+        <p14:creationId xmlns:p14="http://schemas.microsoft.com/office/powerpoint/2010/main" val="1325242527"/>
       </p:ext>
     </p:extLst>
   </p:cSld>
   <p:clrMap bg1="lt1" tx1="dk1" bg2="lt2" tx2="dk2" accent1="accent1" accent2="accent2" accent3="accent3" accent4="accent4" accent5="accent5" accent6="accent6" hlink="hlink" folHlink="folHlink"/>
   <p:sldLayoutIdLst>
-    <p:sldLayoutId id="2147483673" r:id="rId1"/>
-    <p:sldLayoutId id="2147483674" r:id="rId2"/>
-    <p:sldLayoutId id="2147483675" r:id="rId3"/>
-    <p:sldLayoutId id="2147483676" r:id="rId4"/>
-    <p:sldLayoutId id="2147483677" r:id="rId5"/>
-    <p:sldLayoutId id="2147483678" r:id="rId6"/>
-    <p:sldLayoutId id="2147483679" r:id="rId7"/>
-    <p:sldLayoutId id="2147483680" r:id="rId8"/>
-    <p:sldLayoutId id="2147483681" r:id="rId9"/>
-    <p:sldLayoutId id="2147483682" r:id="rId10"/>
-    <p:sldLayoutId id="2147483683" r:id="rId11"/>
+    <p:sldLayoutId id="2147483685" r:id="rId1"/>
+    <p:sldLayoutId id="2147483686" r:id="rId2"/>
+    <p:sldLayoutId id="2147483687" r:id="rId3"/>
+    <p:sldLayoutId id="2147483688" r:id="rId4"/>
+    <p:sldLayoutId id="2147483689" r:id="rId5"/>
+    <p:sldLayoutId id="2147483690" r:id="rId6"/>
+    <p:sldLayoutId id="2147483691" r:id="rId7"/>
+    <p:sldLayoutId id="2147483692" r:id="rId8"/>
+    <p:sldLayoutId id="2147483693" r:id="rId9"/>
+    <p:sldLayoutId id="2147483694" r:id="rId10"/>
+    <p:sldLayoutId id="2147483695" r:id="rId11"/>
   </p:sldLayoutIdLst>
   <p:txStyles>
     <p:titleStyle>
@@ -3004,7 +3028,7 @@
       </p:grpSpPr>
       <p:graphicFrame>
         <p:nvGraphicFramePr>
-          <p:cNvPr id="3" name="Table 2">
+          <p:cNvPr id="4" name="Table 3">
             <a:extLst>
               <a:ext uri="{FF2B5EF4-FFF2-40B4-BE49-F238E27FC236}">
                 <a16:creationId xmlns:a16="http://schemas.microsoft.com/office/drawing/2014/main" id="{15623DAB-A4E1-DF1C-9B96-E2C1CE9DE49A}"/>
@@ -3017,7 +3041,7 @@
           <p:nvPr>
             <p:extLst>
               <p:ext uri="{D42A27DB-BD31-4B8C-83A1-F6EECF244321}">
-                <p14:modId xmlns:p14="http://schemas.microsoft.com/office/powerpoint/2010/main" val="4108717537"/>
+                <p14:modId xmlns:p14="http://schemas.microsoft.com/office/powerpoint/2010/main" val="1377971229"/>
               </p:ext>
             </p:extLst>
           </p:nvPr>
